--- a/docs/RAGとは.pptx
+++ b/docs/RAGとは.pptx
@@ -721,7 +721,7 @@
           <a:lstStyle/>
           <a:p>
             <a:r>
-              <a:t>この3ステップだけ覚えて帰っていただければ十分です。</a:t>
+              <a:t>RAGの検索に使われる技術は、大きくこの6つです。準備の3つは事前に1回やるだけ。質問のたびに動くのは後半の3つです。</a:t>
             </a:r>
           </a:p>
         </p:txBody>
@@ -5796,21 +5796,103 @@
                 <a:ea typeface="Yu Gothic"/>
                 <a:cs typeface="Yu Gothic"/>
               </a:rPr>
-              <a:t>仕組みは 3 ステップだけ</a:t>
-            </a:r>
-          </a:p>
-        </p:txBody>
-      </p:sp>
-      <p:sp>
-        <p:nvSpPr>
-          <p:cNvPr id="3" name="Rounded Rectangle 2"/>
+              <a:t>使われている技術は 6 つだけ</a:t>
+            </a:r>
+          </a:p>
+        </p:txBody>
+      </p:sp>
+      <p:sp>
+        <p:nvSpPr>
+          <p:cNvPr id="3" name="TextBox 2"/>
+          <p:cNvSpPr txBox="1"/>
+          <p:nvPr/>
+        </p:nvSpPr>
+        <p:spPr>
+          <a:xfrm>
+            <a:off x="822960" y="1207008"/>
+            <a:ext cx="10515600" cy="457200"/>
+          </a:xfrm>
+          <a:prstGeom prst="rect">
+            <a:avLst/>
+          </a:prstGeom>
+          <a:noFill/>
+        </p:spPr>
+        <p:txBody>
+          <a:bodyPr wrap="square" lIns="0" rIns="0" tIns="0" bIns="0" anchor="t">
+            <a:spAutoFit/>
+          </a:bodyPr>
+          <a:lstStyle/>
+          <a:p>
+            <a:pPr algn="l">
+              <a:spcAft>
+                <a:spcPts val="600"/>
+              </a:spcAft>
+            </a:pPr>
+            <a:r>
+              <a:rPr sz="1400" b="0">
+                <a:solidFill>
+                  <a:srgbClr val="7A6E66"/>
+                </a:solidFill>
+                <a:latin typeface="Yu Gothic"/>
+                <a:ea typeface="Yu Gothic"/>
+                <a:cs typeface="Yu Gothic"/>
+              </a:rPr>
+              <a:t>準備が 3 つ、質問が来てから 3 つ</a:t>
+            </a:r>
+          </a:p>
+        </p:txBody>
+      </p:sp>
+      <p:sp>
+        <p:nvSpPr>
+          <p:cNvPr id="4" name="TextBox 3"/>
+          <p:cNvSpPr txBox="1"/>
+          <p:nvPr/>
+        </p:nvSpPr>
+        <p:spPr>
+          <a:xfrm>
+            <a:off x="822960" y="1783080"/>
+            <a:ext cx="10515600" cy="274320"/>
+          </a:xfrm>
+          <a:prstGeom prst="rect">
+            <a:avLst/>
+          </a:prstGeom>
+          <a:noFill/>
+        </p:spPr>
+        <p:txBody>
+          <a:bodyPr wrap="square" lIns="0" rIns="0" tIns="0" bIns="0" anchor="t">
+            <a:spAutoFit/>
+          </a:bodyPr>
+          <a:lstStyle/>
+          <a:p>
+            <a:pPr algn="l">
+              <a:spcAft>
+                <a:spcPts val="600"/>
+              </a:spcAft>
+            </a:pPr>
+            <a:r>
+              <a:rPr sz="1300" b="1">
+                <a:solidFill>
+                  <a:srgbClr val="7A6E66"/>
+                </a:solidFill>
+                <a:latin typeface="Yu Gothic"/>
+                <a:ea typeface="Yu Gothic"/>
+                <a:cs typeface="Yu Gothic"/>
+              </a:rPr>
+              <a:t>準備すること（質問が来る前に 1 回やるだけ）</a:t>
+            </a:r>
+          </a:p>
+        </p:txBody>
+      </p:sp>
+      <p:sp>
+        <p:nvSpPr>
+          <p:cNvPr id="5" name="Rounded Rectangle 4"/>
           <p:cNvSpPr/>
           <p:nvPr/>
         </p:nvSpPr>
         <p:spPr>
           <a:xfrm>
-            <a:off x="822960" y="1965960"/>
-            <a:ext cx="3401568" cy="3200400"/>
+            <a:off x="822960" y="2103120"/>
+            <a:ext cx="3401568" cy="1783080"/>
           </a:xfrm>
           <a:prstGeom prst="roundRect">
             <a:avLst>
@@ -5846,14 +5928,14 @@
       </p:sp>
       <p:sp>
         <p:nvSpPr>
-          <p:cNvPr id="4" name="Oval 3"/>
+          <p:cNvPr id="6" name="Oval 5"/>
           <p:cNvSpPr/>
           <p:nvPr/>
         </p:nvSpPr>
         <p:spPr>
           <a:xfrm>
-            <a:off x="1143000" y="2286000"/>
-            <a:ext cx="566928" cy="566928"/>
+            <a:off x="1078992" y="2304288"/>
+            <a:ext cx="457200" cy="457200"/>
           </a:xfrm>
           <a:prstGeom prst="ellipse">
             <a:avLst/>
@@ -5900,14 +5982,14 @@
       </p:sp>
       <p:sp>
         <p:nvSpPr>
-          <p:cNvPr id="5" name="TextBox 4"/>
+          <p:cNvPr id="7" name="TextBox 6"/>
           <p:cNvSpPr txBox="1"/>
           <p:nvPr/>
         </p:nvSpPr>
         <p:spPr>
           <a:xfrm>
-            <a:off x="1143000" y="3063240"/>
-            <a:ext cx="2743200" cy="1828800"/>
+            <a:off x="1645920" y="2377439"/>
+            <a:ext cx="2377440" cy="320040"/>
           </a:xfrm>
           <a:prstGeom prst="rect">
             <a:avLst/>
@@ -5922,11 +6004,11 @@
           <a:p>
             <a:pPr algn="l">
               <a:spcAft>
-                <a:spcPts val="1000"/>
-              </a:spcAft>
-            </a:pPr>
-            <a:r>
-              <a:rPr sz="1800" b="1">
+                <a:spcPts val="600"/>
+              </a:spcAft>
+            </a:pPr>
+            <a:r>
+              <a:rPr sz="1600" b="1">
                 <a:solidFill>
                   <a:srgbClr val="3B2F2A"/>
                 </a:solidFill>
@@ -5934,7 +6016,49 @@
                 <a:ea typeface="Yu Gothic"/>
                 <a:cs typeface="Yu Gothic"/>
               </a:rPr>
-              <a:t>文書を小分けにする</a:t>
+              <a:t>切る</a:t>
+            </a:r>
+          </a:p>
+        </p:txBody>
+      </p:sp>
+      <p:sp>
+        <p:nvSpPr>
+          <p:cNvPr id="8" name="TextBox 7"/>
+          <p:cNvSpPr txBox="1"/>
+          <p:nvPr/>
+        </p:nvSpPr>
+        <p:spPr>
+          <a:xfrm>
+            <a:off x="1078992" y="2944368"/>
+            <a:ext cx="2889504" cy="822960"/>
+          </a:xfrm>
+          <a:prstGeom prst="rect">
+            <a:avLst/>
+          </a:prstGeom>
+          <a:noFill/>
+        </p:spPr>
+        <p:txBody>
+          <a:bodyPr wrap="square" lIns="0" rIns="0" tIns="0" bIns="0" anchor="t">
+            <a:spAutoFit/>
+          </a:bodyPr>
+          <a:lstStyle/>
+          <a:p>
+            <a:pPr algn="l">
+              <a:spcAft>
+                <a:spcPts val="400"/>
+              </a:spcAft>
+            </a:pPr>
+            <a:r>
+              <a:rPr sz="1200" b="0">
+                <a:solidFill>
+                  <a:srgbClr val="7A6E66"/>
+                </a:solidFill>
+                <a:latin typeface="Yu Gothic"/>
+                <a:ea typeface="Yu Gothic"/>
+                <a:cs typeface="Yu Gothic"/>
+              </a:rPr>
+              <a:t>分厚い規程を紙切れに小分けする。
+どこで切るかが精度に一番効く。</a:t>
             </a:r>
           </a:p>
           <a:p>
@@ -5944,7 +6068,7 @@
               </a:spcAft>
             </a:pPr>
             <a:r>
-              <a:rPr sz="1300" b="0">
+              <a:rPr sz="1100" b="1">
                 <a:solidFill>
                   <a:srgbClr val="7A6E66"/>
                 </a:solidFill>
@@ -5952,23 +6076,21 @@
                 <a:ea typeface="Yu Gothic"/>
                 <a:cs typeface="Yu Gothic"/>
               </a:rPr>
-              <a:t>規程を丸ごとは渡せない。
-あらかじめ小さく切っておく。
-どこで切るかが最重要。</a:t>
-            </a:r>
-          </a:p>
-        </p:txBody>
-      </p:sp>
-      <p:sp>
-        <p:nvSpPr>
-          <p:cNvPr id="6" name="Rounded Rectangle 5"/>
+              <a:t>〈チャンク分割〉</a:t>
+            </a:r>
+          </a:p>
+        </p:txBody>
+      </p:sp>
+      <p:sp>
+        <p:nvSpPr>
+          <p:cNvPr id="9" name="Rounded Rectangle 8"/>
           <p:cNvSpPr/>
           <p:nvPr/>
         </p:nvSpPr>
         <p:spPr>
           <a:xfrm>
-            <a:off x="4434840" y="1965960"/>
-            <a:ext cx="3401568" cy="3200400"/>
+            <a:off x="4434840" y="2103120"/>
+            <a:ext cx="3401568" cy="1783080"/>
           </a:xfrm>
           <a:prstGeom prst="roundRect">
             <a:avLst>
@@ -6004,14 +6126,14 @@
       </p:sp>
       <p:sp>
         <p:nvSpPr>
-          <p:cNvPr id="7" name="Oval 6"/>
+          <p:cNvPr id="10" name="Oval 9"/>
           <p:cNvSpPr/>
           <p:nvPr/>
         </p:nvSpPr>
         <p:spPr>
           <a:xfrm>
-            <a:off x="4754880" y="2286000"/>
-            <a:ext cx="566928" cy="566928"/>
+            <a:off x="4690872" y="2304288"/>
+            <a:ext cx="457200" cy="457200"/>
           </a:xfrm>
           <a:prstGeom prst="ellipse">
             <a:avLst/>
@@ -6058,14 +6180,14 @@
       </p:sp>
       <p:sp>
         <p:nvSpPr>
-          <p:cNvPr id="8" name="TextBox 7"/>
+          <p:cNvPr id="11" name="TextBox 10"/>
           <p:cNvSpPr txBox="1"/>
           <p:nvPr/>
         </p:nvSpPr>
         <p:spPr>
           <a:xfrm>
-            <a:off x="4754880" y="3063240"/>
-            <a:ext cx="2743200" cy="1828800"/>
+            <a:off x="5257800" y="2377439"/>
+            <a:ext cx="2377440" cy="320040"/>
           </a:xfrm>
           <a:prstGeom prst="rect">
             <a:avLst/>
@@ -6080,11 +6202,11 @@
           <a:p>
             <a:pPr algn="l">
               <a:spcAft>
-                <a:spcPts val="1000"/>
-              </a:spcAft>
-            </a:pPr>
-            <a:r>
-              <a:rPr sz="1800" b="1">
+                <a:spcPts val="600"/>
+              </a:spcAft>
+            </a:pPr>
+            <a:r>
+              <a:rPr sz="1600" b="1">
                 <a:solidFill>
                   <a:srgbClr val="3B2F2A"/>
                 </a:solidFill>
@@ -6092,7 +6214,49 @@
                 <a:ea typeface="Yu Gothic"/>
                 <a:cs typeface="Yu Gothic"/>
               </a:rPr>
-              <a:t>質問に近い紙を探す</a:t>
+              <a:t>数字にする</a:t>
+            </a:r>
+          </a:p>
+        </p:txBody>
+      </p:sp>
+      <p:sp>
+        <p:nvSpPr>
+          <p:cNvPr id="12" name="TextBox 11"/>
+          <p:cNvSpPr txBox="1"/>
+          <p:nvPr/>
+        </p:nvSpPr>
+        <p:spPr>
+          <a:xfrm>
+            <a:off x="4690872" y="2944368"/>
+            <a:ext cx="2889504" cy="822960"/>
+          </a:xfrm>
+          <a:prstGeom prst="rect">
+            <a:avLst/>
+          </a:prstGeom>
+          <a:noFill/>
+        </p:spPr>
+        <p:txBody>
+          <a:bodyPr wrap="square" lIns="0" rIns="0" tIns="0" bIns="0" anchor="t">
+            <a:spAutoFit/>
+          </a:bodyPr>
+          <a:lstStyle/>
+          <a:p>
+            <a:pPr algn="l">
+              <a:spcAft>
+                <a:spcPts val="400"/>
+              </a:spcAft>
+            </a:pPr>
+            <a:r>
+              <a:rPr sz="1200" b="0">
+                <a:solidFill>
+                  <a:srgbClr val="7A6E66"/>
+                </a:solidFill>
+                <a:latin typeface="Yu Gothic"/>
+                <a:ea typeface="Yu Gothic"/>
+                <a:cs typeface="Yu Gothic"/>
+              </a:rPr>
+              <a:t>紙切れを数字の列に変換する。
+意味が近い紙は近い数字になる。</a:t>
             </a:r>
           </a:p>
           <a:p>
@@ -6102,7 +6266,7 @@
               </a:spcAft>
             </a:pPr>
             <a:r>
-              <a:rPr sz="1300" b="0">
+              <a:rPr sz="1100" b="1">
                 <a:solidFill>
                   <a:srgbClr val="7A6E66"/>
                 </a:solidFill>
@@ -6110,23 +6274,21 @@
                 <a:ea typeface="Yu Gothic"/>
                 <a:cs typeface="Yu Gothic"/>
               </a:rPr>
-              <a:t>言葉の一致で探す方法と、
-意味の近さで探す方法がある。
-得意分野が逆。</a:t>
-            </a:r>
-          </a:p>
-        </p:txBody>
-      </p:sp>
-      <p:sp>
-        <p:nvSpPr>
-          <p:cNvPr id="9" name="Rounded Rectangle 8"/>
+              <a:t>〈埋め込み〉</a:t>
+            </a:r>
+          </a:p>
+        </p:txBody>
+      </p:sp>
+      <p:sp>
+        <p:nvSpPr>
+          <p:cNvPr id="13" name="Rounded Rectangle 12"/>
           <p:cNvSpPr/>
           <p:nvPr/>
         </p:nvSpPr>
         <p:spPr>
           <a:xfrm>
-            <a:off x="8046720" y="1965960"/>
-            <a:ext cx="3401568" cy="3200400"/>
+            <a:off x="8046720" y="2103120"/>
+            <a:ext cx="3401568" cy="1783080"/>
           </a:xfrm>
           <a:prstGeom prst="roundRect">
             <a:avLst>
@@ -6162,14 +6324,14 @@
       </p:sp>
       <p:sp>
         <p:nvSpPr>
-          <p:cNvPr id="10" name="Oval 9"/>
+          <p:cNvPr id="14" name="Oval 13"/>
           <p:cNvSpPr/>
           <p:nvPr/>
         </p:nvSpPr>
         <p:spPr>
           <a:xfrm>
-            <a:off x="8366760" y="2286000"/>
-            <a:ext cx="566928" cy="566928"/>
+            <a:off x="8302752" y="2304288"/>
+            <a:ext cx="457200" cy="457200"/>
           </a:xfrm>
           <a:prstGeom prst="ellipse">
             <a:avLst/>
@@ -6216,14 +6378,14 @@
       </p:sp>
       <p:sp>
         <p:nvSpPr>
-          <p:cNvPr id="11" name="TextBox 10"/>
+          <p:cNvPr id="15" name="TextBox 14"/>
           <p:cNvSpPr txBox="1"/>
           <p:nvPr/>
         </p:nvSpPr>
         <p:spPr>
           <a:xfrm>
-            <a:off x="8366760" y="3063240"/>
-            <a:ext cx="2743200" cy="1828800"/>
+            <a:off x="8869680" y="2377439"/>
+            <a:ext cx="2377440" cy="320040"/>
           </a:xfrm>
           <a:prstGeom prst="rect">
             <a:avLst/>
@@ -6238,11 +6400,11 @@
           <a:p>
             <a:pPr algn="l">
               <a:spcAft>
-                <a:spcPts val="1000"/>
-              </a:spcAft>
-            </a:pPr>
-            <a:r>
-              <a:rPr sz="1800" b="1">
+                <a:spcPts val="600"/>
+              </a:spcAft>
+            </a:pPr>
+            <a:r>
+              <a:rPr sz="1600" b="1">
                 <a:solidFill>
                   <a:srgbClr val="3B2F2A"/>
                 </a:solidFill>
@@ -6250,41 +6412,21 @@
                 <a:ea typeface="Yu Gothic"/>
                 <a:cs typeface="Yu Gothic"/>
               </a:rPr>
-              <a:t>AI に渡す</a:t>
-            </a:r>
-          </a:p>
-          <a:p>
-            <a:pPr algn="l">
-              <a:spcAft>
-                <a:spcPts val="0"/>
-              </a:spcAft>
-            </a:pPr>
-            <a:r>
-              <a:rPr sz="1300" b="0">
-                <a:solidFill>
-                  <a:srgbClr val="7A6E66"/>
-                </a:solidFill>
-                <a:latin typeface="Yu Gothic"/>
-                <a:ea typeface="Yu Gothic"/>
-                <a:cs typeface="Yu Gothic"/>
-              </a:rPr>
-              <a:t>見つけた紙を質問の上に貼る。
-「書いてなければ書いてないと
-答えて」も一緒に指示する。</a:t>
-            </a:r>
-          </a:p>
-        </p:txBody>
-      </p:sp>
-      <p:sp>
-        <p:nvSpPr>
-          <p:cNvPr id="12" name="TextBox 11"/>
+              <a:t>しまう</a:t>
+            </a:r>
+          </a:p>
+        </p:txBody>
+      </p:sp>
+      <p:sp>
+        <p:nvSpPr>
+          <p:cNvPr id="16" name="TextBox 15"/>
           <p:cNvSpPr txBox="1"/>
           <p:nvPr/>
         </p:nvSpPr>
         <p:spPr>
           <a:xfrm>
-            <a:off x="822960" y="5486400"/>
-            <a:ext cx="10515600" cy="365760"/>
+            <a:off x="8302752" y="2944368"/>
+            <a:ext cx="2889504" cy="822960"/>
           </a:xfrm>
           <a:prstGeom prst="rect">
             <a:avLst/>
@@ -6299,11 +6441,564 @@
           <a:p>
             <a:pPr algn="l">
               <a:spcAft>
+                <a:spcPts val="400"/>
+              </a:spcAft>
+            </a:pPr>
+            <a:r>
+              <a:rPr sz="1200" b="0">
+                <a:solidFill>
+                  <a:srgbClr val="7A6E66"/>
+                </a:solidFill>
+                <a:latin typeface="Yu Gothic"/>
+                <a:ea typeface="Yu Gothic"/>
+                <a:cs typeface="Yu Gothic"/>
+              </a:rPr>
+              <a:t>数字をまとめて棚にしまう。
+これで探せる状態になる。</a:t>
+            </a:r>
+          </a:p>
+          <a:p>
+            <a:pPr algn="l">
+              <a:spcAft>
+                <a:spcPts val="0"/>
+              </a:spcAft>
+            </a:pPr>
+            <a:r>
+              <a:rPr sz="1100" b="1">
+                <a:solidFill>
+                  <a:srgbClr val="7A6E66"/>
+                </a:solidFill>
+                <a:latin typeface="Yu Gothic"/>
+                <a:ea typeface="Yu Gothic"/>
+                <a:cs typeface="Yu Gothic"/>
+              </a:rPr>
+              <a:t>〈索引〉</a:t>
+            </a:r>
+          </a:p>
+        </p:txBody>
+      </p:sp>
+      <p:sp>
+        <p:nvSpPr>
+          <p:cNvPr id="17" name="TextBox 16"/>
+          <p:cNvSpPr txBox="1"/>
+          <p:nvPr/>
+        </p:nvSpPr>
+        <p:spPr>
+          <a:xfrm>
+            <a:off x="822960" y="4114800"/>
+            <a:ext cx="10515600" cy="274320"/>
+          </a:xfrm>
+          <a:prstGeom prst="rect">
+            <a:avLst/>
+          </a:prstGeom>
+          <a:noFill/>
+        </p:spPr>
+        <p:txBody>
+          <a:bodyPr wrap="square" lIns="0" rIns="0" tIns="0" bIns="0" anchor="t">
+            <a:spAutoFit/>
+          </a:bodyPr>
+          <a:lstStyle/>
+          <a:p>
+            <a:pPr algn="l">
+              <a:spcAft>
                 <a:spcPts val="600"/>
               </a:spcAft>
             </a:pPr>
             <a:r>
-              <a:rPr sz="1500" b="1">
+              <a:rPr sz="1300" b="1">
+                <a:solidFill>
+                  <a:srgbClr val="7A6E66"/>
+                </a:solidFill>
+                <a:latin typeface="Yu Gothic"/>
+                <a:ea typeface="Yu Gothic"/>
+                <a:cs typeface="Yu Gothic"/>
+              </a:rPr>
+              <a:t>質問が来てから</a:t>
+            </a:r>
+          </a:p>
+        </p:txBody>
+      </p:sp>
+      <p:sp>
+        <p:nvSpPr>
+          <p:cNvPr id="18" name="Rounded Rectangle 17"/>
+          <p:cNvSpPr/>
+          <p:nvPr/>
+        </p:nvSpPr>
+        <p:spPr>
+          <a:xfrm>
+            <a:off x="822960" y="4434840"/>
+            <a:ext cx="3401568" cy="1783080"/>
+          </a:xfrm>
+          <a:prstGeom prst="roundRect">
+            <a:avLst>
+              <a:gd name="adj" fmla="val 6000"/>
+            </a:avLst>
+          </a:prstGeom>
+          <a:solidFill>
+            <a:srgbClr val="FFFFFF"/>
+          </a:solidFill>
+          <a:ln>
+            <a:noFill/>
+          </a:ln>
+        </p:spPr>
+        <p:style>
+          <a:lnRef idx="1">
+            <a:schemeClr val="accent1"/>
+          </a:lnRef>
+          <a:fillRef idx="3">
+            <a:schemeClr val="accent1"/>
+          </a:fillRef>
+          <a:effectRef idx="2">
+            <a:schemeClr val="accent1"/>
+          </a:effectRef>
+          <a:fontRef idx="minor">
+            <a:schemeClr val="lt1"/>
+          </a:fontRef>
+        </p:style>
+        <p:txBody>
+          <a:bodyPr rtlCol="0" anchor="ctr"/>
+          <a:lstStyle/>
+          <a:p/>
+        </p:txBody>
+      </p:sp>
+      <p:sp>
+        <p:nvSpPr>
+          <p:cNvPr id="19" name="Oval 18"/>
+          <p:cNvSpPr/>
+          <p:nvPr/>
+        </p:nvSpPr>
+        <p:spPr>
+          <a:xfrm>
+            <a:off x="1078992" y="4636007"/>
+            <a:ext cx="457200" cy="457200"/>
+          </a:xfrm>
+          <a:prstGeom prst="ellipse">
+            <a:avLst/>
+          </a:prstGeom>
+          <a:solidFill>
+            <a:srgbClr val="B85042"/>
+          </a:solidFill>
+          <a:ln>
+            <a:noFill/>
+          </a:ln>
+        </p:spPr>
+        <p:style>
+          <a:lnRef idx="1">
+            <a:schemeClr val="accent1"/>
+          </a:lnRef>
+          <a:fillRef idx="3">
+            <a:schemeClr val="accent1"/>
+          </a:fillRef>
+          <a:effectRef idx="2">
+            <a:schemeClr val="accent1"/>
+          </a:effectRef>
+          <a:fontRef idx="minor">
+            <a:schemeClr val="lt1"/>
+          </a:fontRef>
+        </p:style>
+        <p:txBody>
+          <a:bodyPr rtlCol="0" anchor="ctr" wrap="none" lIns="0" rIns="0" tIns="0" bIns="0"/>
+          <a:lstStyle/>
+          <a:p>
+            <a:pPr algn="ctr"/>
+            <a:r>
+              <a:rPr sz="2000" b="1">
+                <a:solidFill>
+                  <a:srgbClr val="FFFFFF"/>
+                </a:solidFill>
+                <a:latin typeface="Yu Gothic"/>
+                <a:ea typeface="Yu Gothic"/>
+                <a:cs typeface="Yu Gothic"/>
+              </a:rPr>
+              <a:t>4</a:t>
+            </a:r>
+          </a:p>
+        </p:txBody>
+      </p:sp>
+      <p:sp>
+        <p:nvSpPr>
+          <p:cNvPr id="20" name="TextBox 19"/>
+          <p:cNvSpPr txBox="1"/>
+          <p:nvPr/>
+        </p:nvSpPr>
+        <p:spPr>
+          <a:xfrm>
+            <a:off x="1645920" y="4709159"/>
+            <a:ext cx="2377440" cy="320040"/>
+          </a:xfrm>
+          <a:prstGeom prst="rect">
+            <a:avLst/>
+          </a:prstGeom>
+          <a:noFill/>
+        </p:spPr>
+        <p:txBody>
+          <a:bodyPr wrap="square" lIns="0" rIns="0" tIns="0" bIns="0" anchor="t">
+            <a:spAutoFit/>
+          </a:bodyPr>
+          <a:lstStyle/>
+          <a:p>
+            <a:pPr algn="l">
+              <a:spcAft>
+                <a:spcPts val="600"/>
+              </a:spcAft>
+            </a:pPr>
+            <a:r>
+              <a:rPr sz="1600" b="1">
+                <a:solidFill>
+                  <a:srgbClr val="3B2F2A"/>
+                </a:solidFill>
+                <a:latin typeface="Yu Gothic"/>
+                <a:ea typeface="Yu Gothic"/>
+                <a:cs typeface="Yu Gothic"/>
+              </a:rPr>
+              <a:t>探す</a:t>
+            </a:r>
+          </a:p>
+        </p:txBody>
+      </p:sp>
+      <p:sp>
+        <p:nvSpPr>
+          <p:cNvPr id="21" name="TextBox 20"/>
+          <p:cNvSpPr txBox="1"/>
+          <p:nvPr/>
+        </p:nvSpPr>
+        <p:spPr>
+          <a:xfrm>
+            <a:off x="1078992" y="5276088"/>
+            <a:ext cx="2889504" cy="822960"/>
+          </a:xfrm>
+          <a:prstGeom prst="rect">
+            <a:avLst/>
+          </a:prstGeom>
+          <a:noFill/>
+        </p:spPr>
+        <p:txBody>
+          <a:bodyPr wrap="square" lIns="0" rIns="0" tIns="0" bIns="0" anchor="t">
+            <a:spAutoFit/>
+          </a:bodyPr>
+          <a:lstStyle/>
+          <a:p>
+            <a:pPr algn="l">
+              <a:spcAft>
+                <a:spcPts val="400"/>
+              </a:spcAft>
+            </a:pPr>
+            <a:r>
+              <a:rPr sz="1200" b="0">
+                <a:solidFill>
+                  <a:srgbClr val="7A6E66"/>
+                </a:solidFill>
+                <a:latin typeface="Yu Gothic"/>
+                <a:ea typeface="Yu Gothic"/>
+                <a:cs typeface="Yu Gothic"/>
+              </a:rPr>
+              <a:t>同じ言葉の紙を探す方法と、
+意味が近い紙を探す方法がある。</a:t>
+            </a:r>
+          </a:p>
+          <a:p>
+            <a:pPr algn="l">
+              <a:spcAft>
+                <a:spcPts val="0"/>
+              </a:spcAft>
+            </a:pPr>
+            <a:r>
+              <a:rPr sz="1100" b="1">
+                <a:solidFill>
+                  <a:srgbClr val="7A6E66"/>
+                </a:solidFill>
+                <a:latin typeface="Yu Gothic"/>
+                <a:ea typeface="Yu Gothic"/>
+                <a:cs typeface="Yu Gothic"/>
+              </a:rPr>
+              <a:t>〈BM25 / ベクトル検索〉</a:t>
+            </a:r>
+          </a:p>
+        </p:txBody>
+      </p:sp>
+      <p:sp>
+        <p:nvSpPr>
+          <p:cNvPr id="22" name="Rounded Rectangle 21"/>
+          <p:cNvSpPr/>
+          <p:nvPr/>
+        </p:nvSpPr>
+        <p:spPr>
+          <a:xfrm>
+            <a:off x="4434840" y="4434840"/>
+            <a:ext cx="3401568" cy="1783080"/>
+          </a:xfrm>
+          <a:prstGeom prst="roundRect">
+            <a:avLst>
+              <a:gd name="adj" fmla="val 6000"/>
+            </a:avLst>
+          </a:prstGeom>
+          <a:solidFill>
+            <a:srgbClr val="FFFFFF"/>
+          </a:solidFill>
+          <a:ln>
+            <a:noFill/>
+          </a:ln>
+        </p:spPr>
+        <p:style>
+          <a:lnRef idx="1">
+            <a:schemeClr val="accent1"/>
+          </a:lnRef>
+          <a:fillRef idx="3">
+            <a:schemeClr val="accent1"/>
+          </a:fillRef>
+          <a:effectRef idx="2">
+            <a:schemeClr val="accent1"/>
+          </a:effectRef>
+          <a:fontRef idx="minor">
+            <a:schemeClr val="lt1"/>
+          </a:fontRef>
+        </p:style>
+        <p:txBody>
+          <a:bodyPr rtlCol="0" anchor="ctr"/>
+          <a:lstStyle/>
+          <a:p/>
+        </p:txBody>
+      </p:sp>
+      <p:sp>
+        <p:nvSpPr>
+          <p:cNvPr id="23" name="Oval 22"/>
+          <p:cNvSpPr/>
+          <p:nvPr/>
+        </p:nvSpPr>
+        <p:spPr>
+          <a:xfrm>
+            <a:off x="4690872" y="4636007"/>
+            <a:ext cx="457200" cy="457200"/>
+          </a:xfrm>
+          <a:prstGeom prst="ellipse">
+            <a:avLst/>
+          </a:prstGeom>
+          <a:solidFill>
+            <a:srgbClr val="B85042"/>
+          </a:solidFill>
+          <a:ln>
+            <a:noFill/>
+          </a:ln>
+        </p:spPr>
+        <p:style>
+          <a:lnRef idx="1">
+            <a:schemeClr val="accent1"/>
+          </a:lnRef>
+          <a:fillRef idx="3">
+            <a:schemeClr val="accent1"/>
+          </a:fillRef>
+          <a:effectRef idx="2">
+            <a:schemeClr val="accent1"/>
+          </a:effectRef>
+          <a:fontRef idx="minor">
+            <a:schemeClr val="lt1"/>
+          </a:fontRef>
+        </p:style>
+        <p:txBody>
+          <a:bodyPr rtlCol="0" anchor="ctr" wrap="none" lIns="0" rIns="0" tIns="0" bIns="0"/>
+          <a:lstStyle/>
+          <a:p>
+            <a:pPr algn="ctr"/>
+            <a:r>
+              <a:rPr sz="2000" b="1">
+                <a:solidFill>
+                  <a:srgbClr val="FFFFFF"/>
+                </a:solidFill>
+                <a:latin typeface="Yu Gothic"/>
+                <a:ea typeface="Yu Gothic"/>
+                <a:cs typeface="Yu Gothic"/>
+              </a:rPr>
+              <a:t>5</a:t>
+            </a:r>
+          </a:p>
+        </p:txBody>
+      </p:sp>
+      <p:sp>
+        <p:nvSpPr>
+          <p:cNvPr id="24" name="TextBox 23"/>
+          <p:cNvSpPr txBox="1"/>
+          <p:nvPr/>
+        </p:nvSpPr>
+        <p:spPr>
+          <a:xfrm>
+            <a:off x="5257800" y="4709159"/>
+            <a:ext cx="2377440" cy="320040"/>
+          </a:xfrm>
+          <a:prstGeom prst="rect">
+            <a:avLst/>
+          </a:prstGeom>
+          <a:noFill/>
+        </p:spPr>
+        <p:txBody>
+          <a:bodyPr wrap="square" lIns="0" rIns="0" tIns="0" bIns="0" anchor="t">
+            <a:spAutoFit/>
+          </a:bodyPr>
+          <a:lstStyle/>
+          <a:p>
+            <a:pPr algn="l">
+              <a:spcAft>
+                <a:spcPts val="600"/>
+              </a:spcAft>
+            </a:pPr>
+            <a:r>
+              <a:rPr sz="1600" b="1">
+                <a:solidFill>
+                  <a:srgbClr val="3B2F2A"/>
+                </a:solidFill>
+                <a:latin typeface="Yu Gothic"/>
+                <a:ea typeface="Yu Gothic"/>
+                <a:cs typeface="Yu Gothic"/>
+              </a:rPr>
+              <a:t>順番を決める</a:t>
+            </a:r>
+          </a:p>
+        </p:txBody>
+      </p:sp>
+      <p:sp>
+        <p:nvSpPr>
+          <p:cNvPr id="25" name="TextBox 24"/>
+          <p:cNvSpPr txBox="1"/>
+          <p:nvPr/>
+        </p:nvSpPr>
+        <p:spPr>
+          <a:xfrm>
+            <a:off x="4690872" y="5276088"/>
+            <a:ext cx="2889504" cy="822960"/>
+          </a:xfrm>
+          <a:prstGeom prst="rect">
+            <a:avLst/>
+          </a:prstGeom>
+          <a:noFill/>
+        </p:spPr>
+        <p:txBody>
+          <a:bodyPr wrap="square" lIns="0" rIns="0" tIns="0" bIns="0" anchor="t">
+            <a:spAutoFit/>
+          </a:bodyPr>
+          <a:lstStyle/>
+          <a:p>
+            <a:pPr algn="l">
+              <a:spcAft>
+                <a:spcPts val="400"/>
+              </a:spcAft>
+            </a:pPr>
+            <a:r>
+              <a:rPr sz="1200" b="0">
+                <a:solidFill>
+                  <a:srgbClr val="7A6E66"/>
+                </a:solidFill>
+                <a:latin typeface="Yu Gothic"/>
+                <a:ea typeface="Yu Gothic"/>
+                <a:cs typeface="Yu Gothic"/>
+              </a:rPr>
+              <a:t>2つの結果を1つにまとめる。
+上位だけ見比べて並べ直す。</a:t>
+            </a:r>
+          </a:p>
+          <a:p>
+            <a:pPr algn="l">
+              <a:spcAft>
+                <a:spcPts val="0"/>
+              </a:spcAft>
+            </a:pPr>
+            <a:r>
+              <a:rPr sz="1100" b="1">
+                <a:solidFill>
+                  <a:srgbClr val="7A6E66"/>
+                </a:solidFill>
+                <a:latin typeface="Yu Gothic"/>
+                <a:ea typeface="Yu Gothic"/>
+                <a:cs typeface="Yu Gothic"/>
+              </a:rPr>
+              <a:t>〈融合 / リランク〉</a:t>
+            </a:r>
+          </a:p>
+        </p:txBody>
+      </p:sp>
+      <p:sp>
+        <p:nvSpPr>
+          <p:cNvPr id="26" name="Rounded Rectangle 25"/>
+          <p:cNvSpPr/>
+          <p:nvPr/>
+        </p:nvSpPr>
+        <p:spPr>
+          <a:xfrm>
+            <a:off x="8046720" y="4434840"/>
+            <a:ext cx="3401568" cy="1783080"/>
+          </a:xfrm>
+          <a:prstGeom prst="roundRect">
+            <a:avLst>
+              <a:gd name="adj" fmla="val 6000"/>
+            </a:avLst>
+          </a:prstGeom>
+          <a:solidFill>
+            <a:srgbClr val="B85042"/>
+          </a:solidFill>
+          <a:ln>
+            <a:noFill/>
+          </a:ln>
+        </p:spPr>
+        <p:style>
+          <a:lnRef idx="1">
+            <a:schemeClr val="accent1"/>
+          </a:lnRef>
+          <a:fillRef idx="3">
+            <a:schemeClr val="accent1"/>
+          </a:fillRef>
+          <a:effectRef idx="2">
+            <a:schemeClr val="accent1"/>
+          </a:effectRef>
+          <a:fontRef idx="minor">
+            <a:schemeClr val="lt1"/>
+          </a:fontRef>
+        </p:style>
+        <p:txBody>
+          <a:bodyPr rtlCol="0" anchor="ctr"/>
+          <a:lstStyle/>
+          <a:p/>
+        </p:txBody>
+      </p:sp>
+      <p:sp>
+        <p:nvSpPr>
+          <p:cNvPr id="27" name="Oval 26"/>
+          <p:cNvSpPr/>
+          <p:nvPr/>
+        </p:nvSpPr>
+        <p:spPr>
+          <a:xfrm>
+            <a:off x="8302752" y="4636007"/>
+            <a:ext cx="457200" cy="457200"/>
+          </a:xfrm>
+          <a:prstGeom prst="ellipse">
+            <a:avLst/>
+          </a:prstGeom>
+          <a:solidFill>
+            <a:srgbClr val="FFFFFF"/>
+          </a:solidFill>
+          <a:ln>
+            <a:noFill/>
+          </a:ln>
+        </p:spPr>
+        <p:style>
+          <a:lnRef idx="1">
+            <a:schemeClr val="accent1"/>
+          </a:lnRef>
+          <a:fillRef idx="3">
+            <a:schemeClr val="accent1"/>
+          </a:fillRef>
+          <a:effectRef idx="2">
+            <a:schemeClr val="accent1"/>
+          </a:effectRef>
+          <a:fontRef idx="minor">
+            <a:schemeClr val="lt1"/>
+          </a:fontRef>
+        </p:style>
+        <p:txBody>
+          <a:bodyPr rtlCol="0" anchor="ctr" wrap="none" lIns="0" rIns="0" tIns="0" bIns="0"/>
+          <a:lstStyle/>
+          <a:p>
+            <a:pPr algn="ctr"/>
+            <a:r>
+              <a:rPr sz="2000" b="1">
                 <a:solidFill>
                   <a:srgbClr val="B85042"/>
                 </a:solidFill>
@@ -6311,7 +7006,108 @@
                 <a:ea typeface="Yu Gothic"/>
                 <a:cs typeface="Yu Gothic"/>
               </a:rPr>
-              <a:t>この 3 つで全部。特別な魔法は無い。</a:t>
+              <a:t>6</a:t>
+            </a:r>
+          </a:p>
+        </p:txBody>
+      </p:sp>
+      <p:sp>
+        <p:nvSpPr>
+          <p:cNvPr id="28" name="TextBox 27"/>
+          <p:cNvSpPr txBox="1"/>
+          <p:nvPr/>
+        </p:nvSpPr>
+        <p:spPr>
+          <a:xfrm>
+            <a:off x="8869680" y="4709159"/>
+            <a:ext cx="2377440" cy="320040"/>
+          </a:xfrm>
+          <a:prstGeom prst="rect">
+            <a:avLst/>
+          </a:prstGeom>
+          <a:noFill/>
+        </p:spPr>
+        <p:txBody>
+          <a:bodyPr wrap="square" lIns="0" rIns="0" tIns="0" bIns="0" anchor="t">
+            <a:spAutoFit/>
+          </a:bodyPr>
+          <a:lstStyle/>
+          <a:p>
+            <a:pPr algn="l">
+              <a:spcAft>
+                <a:spcPts val="600"/>
+              </a:spcAft>
+            </a:pPr>
+            <a:r>
+              <a:rPr sz="1600" b="1">
+                <a:solidFill>
+                  <a:srgbClr val="FFFFFF"/>
+                </a:solidFill>
+                <a:latin typeface="Yu Gothic"/>
+                <a:ea typeface="Yu Gothic"/>
+                <a:cs typeface="Yu Gothic"/>
+              </a:rPr>
+              <a:t>AI に渡す</a:t>
+            </a:r>
+          </a:p>
+        </p:txBody>
+      </p:sp>
+      <p:sp>
+        <p:nvSpPr>
+          <p:cNvPr id="29" name="TextBox 28"/>
+          <p:cNvSpPr txBox="1"/>
+          <p:nvPr/>
+        </p:nvSpPr>
+        <p:spPr>
+          <a:xfrm>
+            <a:off x="8302752" y="5276088"/>
+            <a:ext cx="2889504" cy="822960"/>
+          </a:xfrm>
+          <a:prstGeom prst="rect">
+            <a:avLst/>
+          </a:prstGeom>
+          <a:noFill/>
+        </p:spPr>
+        <p:txBody>
+          <a:bodyPr wrap="square" lIns="0" rIns="0" tIns="0" bIns="0" anchor="t">
+            <a:spAutoFit/>
+          </a:bodyPr>
+          <a:lstStyle/>
+          <a:p>
+            <a:pPr algn="l">
+              <a:spcAft>
+                <a:spcPts val="400"/>
+              </a:spcAft>
+            </a:pPr>
+            <a:r>
+              <a:rPr sz="1200" b="0">
+                <a:solidFill>
+                  <a:srgbClr val="F6E2DE"/>
+                </a:solidFill>
+                <a:latin typeface="Yu Gothic"/>
+                <a:ea typeface="Yu Gothic"/>
+                <a:cs typeface="Yu Gothic"/>
+              </a:rPr>
+              <a:t>上位の紙を数枚、質問と一緒に。
+ここで初めて AI が登場する。</a:t>
+            </a:r>
+          </a:p>
+          <a:p>
+            <a:pPr algn="l">
+              <a:spcAft>
+                <a:spcPts val="0"/>
+              </a:spcAft>
+            </a:pPr>
+            <a:r>
+              <a:rPr sz="1100" b="1">
+                <a:solidFill>
+                  <a:srgbClr val="F6E2DE"/>
+                </a:solidFill>
+                <a:latin typeface="Yu Gothic"/>
+                <a:ea typeface="Yu Gothic"/>
+                <a:cs typeface="Yu Gothic"/>
+              </a:rPr>
+              <a:t>〈プロンプト〉</a:t>
             </a:r>
           </a:p>
         </p:txBody>

--- a/docs/RAGとは.pptx
+++ b/docs/RAGとは.pptx
@@ -6058,7 +6058,7 @@
                 <a:cs typeface="Yu Gothic"/>
               </a:rPr>
               <a:t>分厚い規程を紙切れに小分けする。
-どこで切るかが精度に一番効く。</a:t>
+紙切れは1枚だけ取り出して読まれる。</a:t>
             </a:r>
           </a:p>
           <a:p>
@@ -7174,7 +7174,7 @@
                 <a:ea typeface="Yu Gothic"/>
                 <a:cs typeface="Yu Gothic"/>
               </a:rPr>
-              <a:t>いちばん効いたのは「文書の切り方」</a:t>
+              <a:t>測って比べた結果 ： いちばん効いたのは「切り方」</a:t>
             </a:r>
           </a:p>
         </p:txBody>
@@ -7215,7 +7215,7 @@
                 <a:ea typeface="Yu Gothic"/>
                 <a:cs typeface="Yu Gothic"/>
               </a:rPr>
-              <a:t>AI のモデルは一切変えていない。切り方を直しただけ</a:t>
+              <a:t>4 通りの切り方を 41 問で比較。AI のモデルは一度も変えていない</a:t>
             </a:r>
           </a:p>
         </p:txBody>
